--- a/Présentation.pptx
+++ b/Présentation.pptx
@@ -6,7 +6,13 @@
   </p:sldMasterIdLst>
   <p:sldIdLst>
     <p:sldId id="256" r:id="rId2"/>
-    <p:sldId id="257" r:id="rId3"/>
+    <p:sldId id="258" r:id="rId3"/>
+    <p:sldId id="259" r:id="rId4"/>
+    <p:sldId id="260" r:id="rId5"/>
+    <p:sldId id="261" r:id="rId6"/>
+    <p:sldId id="262" r:id="rId7"/>
+    <p:sldId id="263" r:id="rId8"/>
+    <p:sldId id="264" r:id="rId9"/>
   </p:sldIdLst>
   <p:sldSz cx="12192000" cy="6858000"/>
   <p:notesSz cx="6858000" cy="9144000"/>
@@ -3592,10 +3598,158 @@
   <p:cSld>
     <p:spTree>
       <p:nvGrpSpPr>
+        <p:cNvPr id="1" name=""/>
+        <p:cNvGrpSpPr/>
+        <p:nvPr/>
+      </p:nvGrpSpPr>
+      <p:grpSpPr>
+        <a:xfrm>
+          <a:off x="0" y="0"/>
+          <a:ext cx="0" cy="0"/>
+          <a:chOff x="0" y="0"/>
+          <a:chExt cx="0" cy="0"/>
+        </a:xfrm>
+      </p:grpSpPr>
+      <p:sp>
+        <p:nvSpPr>
+          <p:cNvPr id="2" name="Titre 1">
+            <a:extLst>
+              <a:ext uri="{FF2B5EF4-FFF2-40B4-BE49-F238E27FC236}">
+                <a16:creationId xmlns:a16="http://schemas.microsoft.com/office/drawing/2014/main" id="{E1D0180F-A55B-1E86-9B0A-3742B20DA1FB}"/>
+              </a:ext>
+            </a:extLst>
+          </p:cNvPr>
+          <p:cNvSpPr>
+            <a:spLocks noGrp="1"/>
+          </p:cNvSpPr>
+          <p:nvPr>
+            <p:ph type="title"/>
+          </p:nvPr>
+        </p:nvSpPr>
+        <p:spPr/>
+        <p:txBody>
+          <a:bodyPr/>
+          <a:lstStyle/>
+          <a:p>
+            <a:r>
+              <a:rPr lang="fr-FR" b="1" u="sng" dirty="0"/>
+              <a:t>Sommaire</a:t>
+            </a:r>
+          </a:p>
+        </p:txBody>
+      </p:sp>
+      <p:sp>
+        <p:nvSpPr>
+          <p:cNvPr id="3" name="Espace réservé du contenu 2">
+            <a:extLst>
+              <a:ext uri="{FF2B5EF4-FFF2-40B4-BE49-F238E27FC236}">
+                <a16:creationId xmlns:a16="http://schemas.microsoft.com/office/drawing/2014/main" id="{E68B45E7-1505-AB1E-715A-5E9835DE1C09}"/>
+              </a:ext>
+            </a:extLst>
+          </p:cNvPr>
+          <p:cNvSpPr>
+            <a:spLocks noGrp="1"/>
+          </p:cNvSpPr>
+          <p:nvPr>
+            <p:ph idx="1"/>
+          </p:nvPr>
+        </p:nvSpPr>
+        <p:spPr/>
+        <p:txBody>
+          <a:bodyPr>
+            <a:normAutofit/>
+          </a:bodyPr>
+          <a:lstStyle/>
+          <a:p>
+            <a:r>
+              <a:rPr lang="fr-FR" dirty="0"/>
+              <a:t>Présentation du plan prévisionnel</a:t>
+            </a:r>
+          </a:p>
+          <a:p>
+            <a:pPr lvl="1"/>
+            <a:r>
+              <a:rPr lang="fr-FR" dirty="0"/>
+              <a:t>Choix du jeu de données </a:t>
+            </a:r>
+          </a:p>
+          <a:p>
+            <a:pPr lvl="1"/>
+            <a:r>
+              <a:rPr lang="fr-FR" dirty="0"/>
+              <a:t>Choix de modèle </a:t>
+            </a:r>
+          </a:p>
+          <a:p>
+            <a:pPr lvl="1"/>
+            <a:r>
+              <a:rPr lang="fr-FR" dirty="0"/>
+              <a:t>Présentation des sources associées</a:t>
+            </a:r>
+          </a:p>
+          <a:p>
+            <a:r>
+              <a:rPr lang="fr-FR" dirty="0"/>
+              <a:t>Présentation de la démarche mise en œuvre</a:t>
+            </a:r>
+          </a:p>
+          <a:p>
+            <a:pPr lvl="1"/>
+            <a:r>
+              <a:rPr lang="fr-FR" dirty="0"/>
+              <a:t>Présentation des nouveaux concepts et techniques</a:t>
+            </a:r>
+          </a:p>
+          <a:p>
+            <a:pPr lvl="1"/>
+            <a:r>
+              <a:rPr lang="fr-FR" dirty="0"/>
+              <a:t>Restitution des résultats comparés entre le nouvel algorithme et la </a:t>
+            </a:r>
+            <a:r>
+              <a:rPr lang="fr-FR" dirty="0" err="1"/>
+              <a:t>baseline</a:t>
+            </a:r>
+            <a:endParaRPr lang="fr-FR" dirty="0"/>
+          </a:p>
+          <a:p>
+            <a:r>
+              <a:rPr lang="fr-FR" dirty="0"/>
+              <a:t>Démonstration du </a:t>
+            </a:r>
+            <a:r>
+              <a:rPr lang="fr-FR" dirty="0" err="1"/>
+              <a:t>dashboard</a:t>
+            </a:r>
+            <a:r>
+              <a:rPr lang="fr-FR" dirty="0"/>
+              <a:t>, déployé sur le cloud</a:t>
+            </a:r>
+          </a:p>
+        </p:txBody>
+      </p:sp>
+    </p:spTree>
+    <p:extLst>
+      <p:ext uri="{BB962C8B-B14F-4D97-AF65-F5344CB8AC3E}">
+        <p14:creationId xmlns:p14="http://schemas.microsoft.com/office/powerpoint/2010/main" val="811717935"/>
+      </p:ext>
+    </p:extLst>
+  </p:cSld>
+  <p:clrMapOvr>
+    <a:masterClrMapping/>
+  </p:clrMapOvr>
+</p:sld>
+</file>
+
+<file path=ppt/slides/slide3.xml><?xml version="1.0" encoding="utf-8"?>
+<p:sld xmlns:a="http://schemas.openxmlformats.org/drawingml/2006/main" xmlns:r="http://schemas.openxmlformats.org/officeDocument/2006/relationships" xmlns:p="http://schemas.openxmlformats.org/presentationml/2006/main">
+  <p:cSld>
+    <p:spTree>
+      <p:nvGrpSpPr>
         <p:cNvPr id="1" name="">
           <a:extLst>
             <a:ext uri="{FF2B5EF4-FFF2-40B4-BE49-F238E27FC236}">
-              <a16:creationId xmlns:a16="http://schemas.microsoft.com/office/drawing/2014/main" id="{71D37522-67F0-5507-5CC6-D1DF7EDC5FAC}"/>
+              <a16:creationId xmlns:a16="http://schemas.microsoft.com/office/drawing/2014/main" id="{722BF8A2-9C81-6577-D547-362A7AD6F17F}"/>
             </a:ext>
           </a:extLst>
         </p:cNvPr>
@@ -3615,60 +3769,550 @@
           <p:cNvPr id="2" name="Titre 1">
             <a:extLst>
               <a:ext uri="{FF2B5EF4-FFF2-40B4-BE49-F238E27FC236}">
-                <a16:creationId xmlns:a16="http://schemas.microsoft.com/office/drawing/2014/main" id="{CF384A36-C77B-10BC-2F45-E6BC7EA78786}"/>
-              </a:ext>
-            </a:extLst>
-          </p:cNvPr>
-          <p:cNvSpPr>
-            <a:spLocks noGrp="1"/>
-          </p:cNvSpPr>
-          <p:nvPr>
-            <p:ph type="ctrTitle"/>
-          </p:nvPr>
-        </p:nvSpPr>
-        <p:spPr/>
-        <p:txBody>
-          <a:bodyPr/>
-          <a:lstStyle/>
-          <a:p>
-            <a:endParaRPr lang="fr-FR"/>
-          </a:p>
-        </p:txBody>
-      </p:sp>
-      <p:sp>
-        <p:nvSpPr>
-          <p:cNvPr id="3" name="Sous-titre 2">
-            <a:extLst>
-              <a:ext uri="{FF2B5EF4-FFF2-40B4-BE49-F238E27FC236}">
-                <a16:creationId xmlns:a16="http://schemas.microsoft.com/office/drawing/2014/main" id="{EC48B66C-E88F-83A5-E212-E1C766DEEC23}"/>
-              </a:ext>
-            </a:extLst>
-          </p:cNvPr>
-          <p:cNvSpPr>
-            <a:spLocks noGrp="1"/>
-          </p:cNvSpPr>
-          <p:nvPr>
-            <p:ph type="subTitle" idx="1"/>
-          </p:nvPr>
-        </p:nvSpPr>
-        <p:spPr/>
-        <p:txBody>
-          <a:bodyPr/>
-          <a:lstStyle/>
-          <a:p>
-            <a:endParaRPr lang="fr-FR"/>
+                <a16:creationId xmlns:a16="http://schemas.microsoft.com/office/drawing/2014/main" id="{41C164C3-9484-909E-3853-67CCF928D342}"/>
+              </a:ext>
+            </a:extLst>
+          </p:cNvPr>
+          <p:cNvSpPr>
+            <a:spLocks noGrp="1"/>
+          </p:cNvSpPr>
+          <p:nvPr>
+            <p:ph type="title"/>
+          </p:nvPr>
+        </p:nvSpPr>
+        <p:spPr/>
+        <p:txBody>
+          <a:bodyPr>
+            <a:normAutofit/>
+          </a:bodyPr>
+          <a:lstStyle/>
+          <a:p>
+            <a:r>
+              <a:rPr lang="fr-FR" sz="4000" b="1" u="sng" dirty="0"/>
+              <a:t>Choix du jeu de données</a:t>
+            </a:r>
+          </a:p>
+        </p:txBody>
+      </p:sp>
+      <p:sp>
+        <p:nvSpPr>
+          <p:cNvPr id="3" name="Espace réservé du contenu 2">
+            <a:extLst>
+              <a:ext uri="{FF2B5EF4-FFF2-40B4-BE49-F238E27FC236}">
+                <a16:creationId xmlns:a16="http://schemas.microsoft.com/office/drawing/2014/main" id="{22D09F06-6FD1-8F7F-2005-B0A898C82010}"/>
+              </a:ext>
+            </a:extLst>
+          </p:cNvPr>
+          <p:cNvSpPr>
+            <a:spLocks noGrp="1"/>
+          </p:cNvSpPr>
+          <p:nvPr>
+            <p:ph idx="1"/>
+          </p:nvPr>
+        </p:nvSpPr>
+        <p:spPr/>
+        <p:txBody>
+          <a:bodyPr/>
+          <a:lstStyle/>
+          <a:p>
+            <a:endParaRPr lang="fr-FR" dirty="0"/>
           </a:p>
         </p:txBody>
       </p:sp>
     </p:spTree>
     <p:extLst>
       <p:ext uri="{BB962C8B-B14F-4D97-AF65-F5344CB8AC3E}">
-        <p14:creationId xmlns:p14="http://schemas.microsoft.com/office/powerpoint/2010/main" val="3558237602"/>
+        <p14:creationId xmlns:p14="http://schemas.microsoft.com/office/powerpoint/2010/main" val="3668541990"/>
       </p:ext>
     </p:extLst>
   </p:cSld>
   <p:clrMapOvr>
     <a:masterClrMapping/>
+  </p:clrMapOvr>
+</p:sld>
+</file>
+
+<file path=ppt/slides/slide4.xml><?xml version="1.0" encoding="utf-8"?>
+<p:sld xmlns:a="http://schemas.openxmlformats.org/drawingml/2006/main" xmlns:r="http://schemas.openxmlformats.org/officeDocument/2006/relationships" xmlns:p="http://schemas.openxmlformats.org/presentationml/2006/main">
+  <p:cSld>
+    <p:spTree>
+      <p:nvGrpSpPr>
+        <p:cNvPr id="1" name="">
+          <a:extLst>
+            <a:ext uri="{FF2B5EF4-FFF2-40B4-BE49-F238E27FC236}">
+              <a16:creationId xmlns:a16="http://schemas.microsoft.com/office/drawing/2014/main" id="{4AC76B1B-C67F-D5E0-7C47-6B58A5212BC6}"/>
+            </a:ext>
+          </a:extLst>
+        </p:cNvPr>
+        <p:cNvGrpSpPr/>
+        <p:nvPr/>
+      </p:nvGrpSpPr>
+      <p:grpSpPr>
+        <a:xfrm>
+          <a:off x="0" y="0"/>
+          <a:ext cx="0" cy="0"/>
+          <a:chOff x="0" y="0"/>
+          <a:chExt cx="0" cy="0"/>
+        </a:xfrm>
+      </p:grpSpPr>
+      <p:sp>
+        <p:nvSpPr>
+          <p:cNvPr id="2" name="Titre 1">
+            <a:extLst>
+              <a:ext uri="{FF2B5EF4-FFF2-40B4-BE49-F238E27FC236}">
+                <a16:creationId xmlns:a16="http://schemas.microsoft.com/office/drawing/2014/main" id="{93913D4B-2008-E084-4DAD-6708BC6AC111}"/>
+              </a:ext>
+            </a:extLst>
+          </p:cNvPr>
+          <p:cNvSpPr>
+            <a:spLocks noGrp="1"/>
+          </p:cNvSpPr>
+          <p:nvPr>
+            <p:ph type="title"/>
+          </p:nvPr>
+        </p:nvSpPr>
+        <p:spPr/>
+        <p:txBody>
+          <a:bodyPr>
+            <a:normAutofit/>
+          </a:bodyPr>
+          <a:lstStyle/>
+          <a:p>
+            <a:r>
+              <a:rPr lang="fr-FR" sz="4000" b="1" u="sng" dirty="0"/>
+              <a:t>Choix du modèle</a:t>
+            </a:r>
+          </a:p>
+        </p:txBody>
+      </p:sp>
+      <p:sp>
+        <p:nvSpPr>
+          <p:cNvPr id="3" name="Espace réservé du contenu 2">
+            <a:extLst>
+              <a:ext uri="{FF2B5EF4-FFF2-40B4-BE49-F238E27FC236}">
+                <a16:creationId xmlns:a16="http://schemas.microsoft.com/office/drawing/2014/main" id="{ED9B9475-B13C-B257-A906-F30A1E376BF6}"/>
+              </a:ext>
+            </a:extLst>
+          </p:cNvPr>
+          <p:cNvSpPr>
+            <a:spLocks noGrp="1"/>
+          </p:cNvSpPr>
+          <p:nvPr>
+            <p:ph idx="1"/>
+          </p:nvPr>
+        </p:nvSpPr>
+        <p:spPr/>
+        <p:txBody>
+          <a:bodyPr/>
+          <a:lstStyle/>
+          <a:p>
+            <a:endParaRPr lang="fr-FR" dirty="0"/>
+          </a:p>
+        </p:txBody>
+      </p:sp>
+    </p:spTree>
+    <p:extLst>
+      <p:ext uri="{BB962C8B-B14F-4D97-AF65-F5344CB8AC3E}">
+        <p14:creationId xmlns:p14="http://schemas.microsoft.com/office/powerpoint/2010/main" val="1591885504"/>
+      </p:ext>
+    </p:extLst>
+  </p:cSld>
+  <p:clrMapOvr>
+    <a:masterClrMapping/>
+  </p:clrMapOvr>
+</p:sld>
+</file>
+
+<file path=ppt/slides/slide5.xml><?xml version="1.0" encoding="utf-8"?>
+<p:sld xmlns:a="http://schemas.openxmlformats.org/drawingml/2006/main" xmlns:r="http://schemas.openxmlformats.org/officeDocument/2006/relationships" xmlns:p="http://schemas.openxmlformats.org/presentationml/2006/main">
+  <p:cSld>
+    <p:spTree>
+      <p:nvGrpSpPr>
+        <p:cNvPr id="1" name="">
+          <a:extLst>
+            <a:ext uri="{FF2B5EF4-FFF2-40B4-BE49-F238E27FC236}">
+              <a16:creationId xmlns:a16="http://schemas.microsoft.com/office/drawing/2014/main" id="{8EAA83B0-D74B-1650-F1E9-3C79B4A7E252}"/>
+            </a:ext>
+          </a:extLst>
+        </p:cNvPr>
+        <p:cNvGrpSpPr/>
+        <p:nvPr/>
+      </p:nvGrpSpPr>
+      <p:grpSpPr>
+        <a:xfrm>
+          <a:off x="0" y="0"/>
+          <a:ext cx="0" cy="0"/>
+          <a:chOff x="0" y="0"/>
+          <a:chExt cx="0" cy="0"/>
+        </a:xfrm>
+      </p:grpSpPr>
+      <p:sp>
+        <p:nvSpPr>
+          <p:cNvPr id="2" name="Titre 1">
+            <a:extLst>
+              <a:ext uri="{FF2B5EF4-FFF2-40B4-BE49-F238E27FC236}">
+                <a16:creationId xmlns:a16="http://schemas.microsoft.com/office/drawing/2014/main" id="{14A752A6-263E-09C8-0E06-599D4873DF9E}"/>
+              </a:ext>
+            </a:extLst>
+          </p:cNvPr>
+          <p:cNvSpPr>
+            <a:spLocks noGrp="1"/>
+          </p:cNvSpPr>
+          <p:nvPr>
+            <p:ph type="title"/>
+          </p:nvPr>
+        </p:nvSpPr>
+        <p:spPr/>
+        <p:txBody>
+          <a:bodyPr>
+            <a:normAutofit/>
+          </a:bodyPr>
+          <a:lstStyle/>
+          <a:p>
+            <a:r>
+              <a:rPr lang="fr-FR" sz="4000" b="1" u="sng" dirty="0"/>
+              <a:t>Présentation des sources associées </a:t>
+            </a:r>
+          </a:p>
+        </p:txBody>
+      </p:sp>
+      <p:sp>
+        <p:nvSpPr>
+          <p:cNvPr id="3" name="Espace réservé du contenu 2">
+            <a:extLst>
+              <a:ext uri="{FF2B5EF4-FFF2-40B4-BE49-F238E27FC236}">
+                <a16:creationId xmlns:a16="http://schemas.microsoft.com/office/drawing/2014/main" id="{F61EF801-206A-753F-EBA9-E6D357F22CC7}"/>
+              </a:ext>
+            </a:extLst>
+          </p:cNvPr>
+          <p:cNvSpPr>
+            <a:spLocks noGrp="1"/>
+          </p:cNvSpPr>
+          <p:nvPr>
+            <p:ph idx="1"/>
+          </p:nvPr>
+        </p:nvSpPr>
+        <p:spPr/>
+        <p:txBody>
+          <a:bodyPr/>
+          <a:lstStyle/>
+          <a:p>
+            <a:endParaRPr lang="fr-FR" dirty="0"/>
+          </a:p>
+        </p:txBody>
+      </p:sp>
+    </p:spTree>
+    <p:extLst>
+      <p:ext uri="{BB962C8B-B14F-4D97-AF65-F5344CB8AC3E}">
+        <p14:creationId xmlns:p14="http://schemas.microsoft.com/office/powerpoint/2010/main" val="809868598"/>
+      </p:ext>
+    </p:extLst>
+  </p:cSld>
+  <p:clrMapOvr>
+    <a:masterClrMapping/>
+  </p:clrMapOvr>
+</p:sld>
+</file>
+
+<file path=ppt/slides/slide6.xml><?xml version="1.0" encoding="utf-8"?>
+<p:sld xmlns:a="http://schemas.openxmlformats.org/drawingml/2006/main" xmlns:r="http://schemas.openxmlformats.org/officeDocument/2006/relationships" xmlns:p="http://schemas.openxmlformats.org/presentationml/2006/main">
+  <p:cSld>
+    <p:spTree>
+      <p:nvGrpSpPr>
+        <p:cNvPr id="1" name="">
+          <a:extLst>
+            <a:ext uri="{FF2B5EF4-FFF2-40B4-BE49-F238E27FC236}">
+              <a16:creationId xmlns:a16="http://schemas.microsoft.com/office/drawing/2014/main" id="{46828D85-71E5-193A-6A37-0ADBE0808D48}"/>
+            </a:ext>
+          </a:extLst>
+        </p:cNvPr>
+        <p:cNvGrpSpPr/>
+        <p:nvPr/>
+      </p:nvGrpSpPr>
+      <p:grpSpPr>
+        <a:xfrm>
+          <a:off x="0" y="0"/>
+          <a:ext cx="0" cy="0"/>
+          <a:chOff x="0" y="0"/>
+          <a:chExt cx="0" cy="0"/>
+        </a:xfrm>
+      </p:grpSpPr>
+      <p:sp>
+        <p:nvSpPr>
+          <p:cNvPr id="2" name="Titre 1">
+            <a:extLst>
+              <a:ext uri="{FF2B5EF4-FFF2-40B4-BE49-F238E27FC236}">
+                <a16:creationId xmlns:a16="http://schemas.microsoft.com/office/drawing/2014/main" id="{709BAA2F-D842-6DF3-BB31-88AB61DFB5F0}"/>
+              </a:ext>
+            </a:extLst>
+          </p:cNvPr>
+          <p:cNvSpPr>
+            <a:spLocks noGrp="1"/>
+          </p:cNvSpPr>
+          <p:nvPr>
+            <p:ph type="title"/>
+          </p:nvPr>
+        </p:nvSpPr>
+        <p:spPr/>
+        <p:txBody>
+          <a:bodyPr>
+            <a:normAutofit/>
+          </a:bodyPr>
+          <a:lstStyle/>
+          <a:p>
+            <a:r>
+              <a:rPr lang="fr-FR" sz="4000" b="1" u="sng" dirty="0"/>
+              <a:t>Présentation des nouveaux concepts et techniques</a:t>
+            </a:r>
+          </a:p>
+        </p:txBody>
+      </p:sp>
+      <p:sp>
+        <p:nvSpPr>
+          <p:cNvPr id="3" name="Espace réservé du contenu 2">
+            <a:extLst>
+              <a:ext uri="{FF2B5EF4-FFF2-40B4-BE49-F238E27FC236}">
+                <a16:creationId xmlns:a16="http://schemas.microsoft.com/office/drawing/2014/main" id="{008318D0-048B-681D-8C59-1CE64421CD59}"/>
+              </a:ext>
+            </a:extLst>
+          </p:cNvPr>
+          <p:cNvSpPr>
+            <a:spLocks noGrp="1"/>
+          </p:cNvSpPr>
+          <p:nvPr>
+            <p:ph idx="1"/>
+          </p:nvPr>
+        </p:nvSpPr>
+        <p:spPr/>
+        <p:txBody>
+          <a:bodyPr/>
+          <a:lstStyle/>
+          <a:p>
+            <a:endParaRPr lang="fr-FR" dirty="0"/>
+          </a:p>
+        </p:txBody>
+      </p:sp>
+    </p:spTree>
+    <p:extLst>
+      <p:ext uri="{BB962C8B-B14F-4D97-AF65-F5344CB8AC3E}">
+        <p14:creationId xmlns:p14="http://schemas.microsoft.com/office/powerpoint/2010/main" val="3142635348"/>
+      </p:ext>
+    </p:extLst>
+  </p:cSld>
+  <p:clrMapOvr>
+    <a:masterClrMapping/>
+  </p:clrMapOvr>
+</p:sld>
+</file>
+
+<file path=ppt/slides/slide7.xml><?xml version="1.0" encoding="utf-8"?>
+<p:sld xmlns:a="http://schemas.openxmlformats.org/drawingml/2006/main" xmlns:r="http://schemas.openxmlformats.org/officeDocument/2006/relationships" xmlns:p="http://schemas.openxmlformats.org/presentationml/2006/main">
+  <p:cSld>
+    <p:bg>
+      <p:bgRef idx="1001">
+        <a:schemeClr val="bg1"/>
+      </p:bgRef>
+    </p:bg>
+    <p:spTree>
+      <p:nvGrpSpPr>
+        <p:cNvPr id="1" name="">
+          <a:extLst>
+            <a:ext uri="{FF2B5EF4-FFF2-40B4-BE49-F238E27FC236}">
+              <a16:creationId xmlns:a16="http://schemas.microsoft.com/office/drawing/2014/main" id="{F67B6BBA-9705-5FC3-A17E-901C32933836}"/>
+            </a:ext>
+          </a:extLst>
+        </p:cNvPr>
+        <p:cNvGrpSpPr/>
+        <p:nvPr/>
+      </p:nvGrpSpPr>
+      <p:grpSpPr>
+        <a:xfrm>
+          <a:off x="0" y="0"/>
+          <a:ext cx="0" cy="0"/>
+          <a:chOff x="0" y="0"/>
+          <a:chExt cx="0" cy="0"/>
+        </a:xfrm>
+      </p:grpSpPr>
+      <p:sp>
+        <p:nvSpPr>
+          <p:cNvPr id="2" name="Titre 1">
+            <a:extLst>
+              <a:ext uri="{FF2B5EF4-FFF2-40B4-BE49-F238E27FC236}">
+                <a16:creationId xmlns:a16="http://schemas.microsoft.com/office/drawing/2014/main" id="{1AAF3A72-440E-AB11-20D9-18668129DB29}"/>
+              </a:ext>
+            </a:extLst>
+          </p:cNvPr>
+          <p:cNvSpPr>
+            <a:spLocks noGrp="1"/>
+          </p:cNvSpPr>
+          <p:nvPr>
+            <p:ph type="title"/>
+          </p:nvPr>
+        </p:nvSpPr>
+        <p:spPr/>
+        <p:txBody>
+          <a:bodyPr>
+            <a:normAutofit fontScale="90000"/>
+          </a:bodyPr>
+          <a:lstStyle/>
+          <a:p>
+            <a:pPr lvl="1"/>
+            <a:r>
+              <a:rPr lang="fr-FR" sz="4400" b="1" u="sng" dirty="0">
+                <a:latin typeface="+mj-lt"/>
+              </a:rPr>
+              <a:t>Restitution des résultats comparés entre le nouvel algorithme et la </a:t>
+            </a:r>
+            <a:r>
+              <a:rPr lang="fr-FR" sz="4400" b="1" u="sng" dirty="0" err="1">
+                <a:latin typeface="+mj-lt"/>
+              </a:rPr>
+              <a:t>baseline</a:t>
+            </a:r>
+            <a:endParaRPr lang="fr-FR" sz="4400" b="1" u="sng" dirty="0">
+              <a:latin typeface="+mj-lt"/>
+            </a:endParaRPr>
+          </a:p>
+        </p:txBody>
+      </p:sp>
+      <p:sp>
+        <p:nvSpPr>
+          <p:cNvPr id="3" name="Espace réservé du contenu 2">
+            <a:extLst>
+              <a:ext uri="{FF2B5EF4-FFF2-40B4-BE49-F238E27FC236}">
+                <a16:creationId xmlns:a16="http://schemas.microsoft.com/office/drawing/2014/main" id="{964A9DCF-274C-BC36-0773-D28E0E22BAFE}"/>
+              </a:ext>
+            </a:extLst>
+          </p:cNvPr>
+          <p:cNvSpPr>
+            <a:spLocks noGrp="1"/>
+          </p:cNvSpPr>
+          <p:nvPr>
+            <p:ph idx="1"/>
+          </p:nvPr>
+        </p:nvSpPr>
+        <p:spPr/>
+        <p:txBody>
+          <a:bodyPr/>
+          <a:lstStyle/>
+          <a:p>
+            <a:endParaRPr lang="fr-FR" dirty="0"/>
+          </a:p>
+        </p:txBody>
+      </p:sp>
+    </p:spTree>
+    <p:extLst>
+      <p:ext uri="{BB962C8B-B14F-4D97-AF65-F5344CB8AC3E}">
+        <p14:creationId xmlns:p14="http://schemas.microsoft.com/office/powerpoint/2010/main" val="84356174"/>
+      </p:ext>
+    </p:extLst>
+  </p:cSld>
+  <p:clrMapOvr>
+    <a:overrideClrMapping bg1="lt1" tx1="dk1" bg2="lt2" tx2="dk2" accent1="accent1" accent2="accent2" accent3="accent3" accent4="accent4" accent5="accent5" accent6="accent6" hlink="hlink" folHlink="folHlink"/>
+  </p:clrMapOvr>
+</p:sld>
+</file>
+
+<file path=ppt/slides/slide8.xml><?xml version="1.0" encoding="utf-8"?>
+<p:sld xmlns:a="http://schemas.openxmlformats.org/drawingml/2006/main" xmlns:r="http://schemas.openxmlformats.org/officeDocument/2006/relationships" xmlns:p="http://schemas.openxmlformats.org/presentationml/2006/main">
+  <p:cSld>
+    <p:bg>
+      <p:bgRef idx="1001">
+        <a:schemeClr val="bg1"/>
+      </p:bgRef>
+    </p:bg>
+    <p:spTree>
+      <p:nvGrpSpPr>
+        <p:cNvPr id="1" name="">
+          <a:extLst>
+            <a:ext uri="{FF2B5EF4-FFF2-40B4-BE49-F238E27FC236}">
+              <a16:creationId xmlns:a16="http://schemas.microsoft.com/office/drawing/2014/main" id="{26519318-5ADB-2B39-5F90-7556103BD2C8}"/>
+            </a:ext>
+          </a:extLst>
+        </p:cNvPr>
+        <p:cNvGrpSpPr/>
+        <p:nvPr/>
+      </p:nvGrpSpPr>
+      <p:grpSpPr>
+        <a:xfrm>
+          <a:off x="0" y="0"/>
+          <a:ext cx="0" cy="0"/>
+          <a:chOff x="0" y="0"/>
+          <a:chExt cx="0" cy="0"/>
+        </a:xfrm>
+      </p:grpSpPr>
+      <p:sp>
+        <p:nvSpPr>
+          <p:cNvPr id="2" name="Titre 1">
+            <a:extLst>
+              <a:ext uri="{FF2B5EF4-FFF2-40B4-BE49-F238E27FC236}">
+                <a16:creationId xmlns:a16="http://schemas.microsoft.com/office/drawing/2014/main" id="{6DA66B28-21B3-68A9-DF9B-2A17272ED2CC}"/>
+              </a:ext>
+            </a:extLst>
+          </p:cNvPr>
+          <p:cNvSpPr>
+            <a:spLocks noGrp="1"/>
+          </p:cNvSpPr>
+          <p:nvPr>
+            <p:ph type="title"/>
+          </p:nvPr>
+        </p:nvSpPr>
+        <p:spPr/>
+        <p:txBody>
+          <a:bodyPr>
+            <a:normAutofit/>
+          </a:bodyPr>
+          <a:lstStyle/>
+          <a:p>
+            <a:r>
+              <a:rPr lang="fr-FR" sz="4000" b="1" u="sng" dirty="0"/>
+              <a:t>Démonstration du </a:t>
+            </a:r>
+            <a:r>
+              <a:rPr lang="fr-FR" sz="4000" b="1" u="sng" dirty="0" err="1"/>
+              <a:t>dashboard</a:t>
+            </a:r>
+            <a:r>
+              <a:rPr lang="fr-FR" sz="4000" b="1" u="sng" dirty="0"/>
+              <a:t>, déployé sur le cloud</a:t>
+            </a:r>
+          </a:p>
+        </p:txBody>
+      </p:sp>
+      <p:sp>
+        <p:nvSpPr>
+          <p:cNvPr id="3" name="Espace réservé du contenu 2">
+            <a:extLst>
+              <a:ext uri="{FF2B5EF4-FFF2-40B4-BE49-F238E27FC236}">
+                <a16:creationId xmlns:a16="http://schemas.microsoft.com/office/drawing/2014/main" id="{D019BE95-B4B2-0C2A-23FC-43BCDF948A45}"/>
+              </a:ext>
+            </a:extLst>
+          </p:cNvPr>
+          <p:cNvSpPr>
+            <a:spLocks noGrp="1"/>
+          </p:cNvSpPr>
+          <p:nvPr>
+            <p:ph idx="1"/>
+          </p:nvPr>
+        </p:nvSpPr>
+        <p:spPr/>
+        <p:txBody>
+          <a:bodyPr/>
+          <a:lstStyle/>
+          <a:p>
+            <a:endParaRPr lang="fr-FR" dirty="0"/>
+          </a:p>
+        </p:txBody>
+      </p:sp>
+    </p:spTree>
+    <p:extLst>
+      <p:ext uri="{BB962C8B-B14F-4D97-AF65-F5344CB8AC3E}">
+        <p14:creationId xmlns:p14="http://schemas.microsoft.com/office/powerpoint/2010/main" val="696295666"/>
+      </p:ext>
+    </p:extLst>
+  </p:cSld>
+  <p:clrMapOvr>
+    <a:overrideClrMapping bg1="lt1" tx1="dk1" bg2="lt2" tx2="dk2" accent1="accent1" accent2="accent2" accent3="accent3" accent4="accent4" accent5="accent5" accent6="accent6" hlink="hlink" folHlink="folHlink"/>
   </p:clrMapOvr>
 </p:sld>
 </file>
@@ -3966,4 +4610,90 @@
     </a:ext>
   </a:extLst>
 </a:theme>
+</file>
+
+<file path=ppt/theme/themeOverride1.xml><?xml version="1.0" encoding="utf-8"?>
+<a:themeOverride xmlns:a="http://schemas.openxmlformats.org/drawingml/2006/main">
+  <a:clrScheme name="Office">
+    <a:dk1>
+      <a:sysClr val="windowText" lastClr="000000"/>
+    </a:dk1>
+    <a:lt1>
+      <a:sysClr val="window" lastClr="FFFFFF"/>
+    </a:lt1>
+    <a:dk2>
+      <a:srgbClr val="44546A"/>
+    </a:dk2>
+    <a:lt2>
+      <a:srgbClr val="E7E6E6"/>
+    </a:lt2>
+    <a:accent1>
+      <a:srgbClr val="4472C4"/>
+    </a:accent1>
+    <a:accent2>
+      <a:srgbClr val="ED7D31"/>
+    </a:accent2>
+    <a:accent3>
+      <a:srgbClr val="A5A5A5"/>
+    </a:accent3>
+    <a:accent4>
+      <a:srgbClr val="FFC000"/>
+    </a:accent4>
+    <a:accent5>
+      <a:srgbClr val="5B9BD5"/>
+    </a:accent5>
+    <a:accent6>
+      <a:srgbClr val="70AD47"/>
+    </a:accent6>
+    <a:hlink>
+      <a:srgbClr val="0563C1"/>
+    </a:hlink>
+    <a:folHlink>
+      <a:srgbClr val="954F72"/>
+    </a:folHlink>
+  </a:clrScheme>
+</a:themeOverride>
+</file>
+
+<file path=ppt/theme/themeOverride2.xml><?xml version="1.0" encoding="utf-8"?>
+<a:themeOverride xmlns:a="http://schemas.openxmlformats.org/drawingml/2006/main">
+  <a:clrScheme name="Office">
+    <a:dk1>
+      <a:sysClr val="windowText" lastClr="000000"/>
+    </a:dk1>
+    <a:lt1>
+      <a:sysClr val="window" lastClr="FFFFFF"/>
+    </a:lt1>
+    <a:dk2>
+      <a:srgbClr val="44546A"/>
+    </a:dk2>
+    <a:lt2>
+      <a:srgbClr val="E7E6E6"/>
+    </a:lt2>
+    <a:accent1>
+      <a:srgbClr val="4472C4"/>
+    </a:accent1>
+    <a:accent2>
+      <a:srgbClr val="ED7D31"/>
+    </a:accent2>
+    <a:accent3>
+      <a:srgbClr val="A5A5A5"/>
+    </a:accent3>
+    <a:accent4>
+      <a:srgbClr val="FFC000"/>
+    </a:accent4>
+    <a:accent5>
+      <a:srgbClr val="5B9BD5"/>
+    </a:accent5>
+    <a:accent6>
+      <a:srgbClr val="70AD47"/>
+    </a:accent6>
+    <a:hlink>
+      <a:srgbClr val="0563C1"/>
+    </a:hlink>
+    <a:folHlink>
+      <a:srgbClr val="954F72"/>
+    </a:folHlink>
+  </a:clrScheme>
+</a:themeOverride>
 </file>